--- a/dist/초1/국어/한글/초1_국어_한글_01_기본모음_학생용.pptx
+++ b/dist/초1/국어/한글/초1_국어_한글_01_기본모음_학생용.pptx
@@ -119,20 +119,20 @@
   <p:extLst>
     <p:ext uri="{521415D9-36F7-43E2-AB2F-B90AF26B5E84}">
       <p14:sectionLst xmlns:p14="http://schemas.microsoft.com/office/powerpoint/2010/main">
-        <p14:section name="도입" id="{cc523fea-38a0-74a8-ef68-cbc4c8ec3416}">
+        <p14:section name="도입" id="{e03a6032-909b-4665-1c27-a2705d0f3e2c}">
           <p14:sldIdLst>
             <p14:sldId id="256"/>
             <p14:sldId id="257"/>
           </p14:sldIdLst>
         </p14:section>
-        <p14:section name="개념" id="{f36c204f-36ab-07c7-2f89-6b24d82d2a86}">
+        <p14:section name="개념" id="{908002bb-2ae3-64e6-0790-772d0872f506}">
           <p14:sldIdLst>
             <p14:sldId id="258"/>
             <p14:sldId id="259"/>
             <p14:sldId id="260"/>
           </p14:sldIdLst>
         </p14:section>
-        <p14:section name="연습" id="{c22d1c44-332e-26d5-ce2c-58601ff3ca01}">
+        <p14:section name="연습" id="{5ad3eefb-825b-45af-fedd-abc8258c23db}">
           <p14:sldIdLst>
             <p14:sldId id="261"/>
             <p14:sldId id="262"/>
@@ -140,18 +140,18 @@
             <p14:sldId id="264"/>
           </p14:sldIdLst>
         </p14:section>
-        <p14:section name="확인" id="{fa3f7ea8-b3ac-ffff-323c-9936c4594de9}">
+        <p14:section name="확인" id="{3d3e1277-f408-4f7f-0941-7d0429371cf0}">
           <p14:sldIdLst>
             <p14:sldId id="265"/>
             <p14:sldId id="266"/>
           </p14:sldIdLst>
         </p14:section>
-        <p14:section name="정리" id="{418d0f58-cafa-b484-4a84-e7775c81fba2}">
+        <p14:section name="정리" id="{fa2788df-1a0a-37b8-6803-9b82dbaf876d}">
           <p14:sldIdLst>
             <p14:sldId id="267"/>
           </p14:sldIdLst>
         </p14:section>
-        <p14:section name="보충" id="{7c9e0eb8-487a-9472-f055-9e4113f95ea8}">
+        <p14:section name="보충" id="{1d7fcef3-5f88-3093-3890-499658c123f3}">
           <p14:sldIdLst>
             <p14:sldId id="268"/>
           </p14:sldIdLst>

--- a/dist/초1/국어/한글/초1_국어_한글_01_기본모음_학생용.pptx
+++ b/dist/초1/국어/한글/초1_국어_한글_01_기본모음_학생용.pptx
@@ -119,20 +119,20 @@
   <p:extLst>
     <p:ext uri="{521415D9-36F7-43E2-AB2F-B90AF26B5E84}">
       <p14:sectionLst xmlns:p14="http://schemas.microsoft.com/office/powerpoint/2010/main">
-        <p14:section name="도입" id="{e03a6032-909b-4665-1c27-a2705d0f3e2c}">
+        <p14:section name="도입" id="{8c72f664-6fc8-a26f-7429-aabac320b8aa}">
           <p14:sldIdLst>
             <p14:sldId id="256"/>
             <p14:sldId id="257"/>
           </p14:sldIdLst>
         </p14:section>
-        <p14:section name="개념" id="{908002bb-2ae3-64e6-0790-772d0872f506}">
+        <p14:section name="개념" id="{cdea476a-cc7a-69e6-27fd-c0e0c76eb689}">
           <p14:sldIdLst>
             <p14:sldId id="258"/>
             <p14:sldId id="259"/>
             <p14:sldId id="260"/>
           </p14:sldIdLst>
         </p14:section>
-        <p14:section name="연습" id="{5ad3eefb-825b-45af-fedd-abc8258c23db}">
+        <p14:section name="연습" id="{8277f7a0-3839-72d6-c72d-87f5db2eaea8}">
           <p14:sldIdLst>
             <p14:sldId id="261"/>
             <p14:sldId id="262"/>
@@ -140,18 +140,18 @@
             <p14:sldId id="264"/>
           </p14:sldIdLst>
         </p14:section>
-        <p14:section name="확인" id="{3d3e1277-f408-4f7f-0941-7d0429371cf0}">
+        <p14:section name="확인" id="{0154839b-2d7d-81f1-69cb-3b316ab72e8c}">
           <p14:sldIdLst>
             <p14:sldId id="265"/>
             <p14:sldId id="266"/>
           </p14:sldIdLst>
         </p14:section>
-        <p14:section name="정리" id="{fa2788df-1a0a-37b8-6803-9b82dbaf876d}">
+        <p14:section name="정리" id="{f7679877-3b32-7a6a-cfb2-6e4a7f38a7b8}">
           <p14:sldIdLst>
             <p14:sldId id="267"/>
           </p14:sldIdLst>
         </p14:section>
-        <p14:section name="보충" id="{1d7fcef3-5f88-3093-3890-499658c123f3}">
+        <p14:section name="보충" id="{2db3e5f3-76cc-6a03-fb1f-fde00a163736}">
           <p14:sldIdLst>
             <p14:sldId id="268"/>
           </p14:sldIdLst>
@@ -3211,12 +3211,12 @@
         </p:nvSpPr>
         <p:spPr>
           <a:xfrm>
-            <a:off x="1344168" y="2017776"/>
-            <a:ext cx="1267968" cy="1267968"/>
+            <a:off x="1965960" y="2011680"/>
+            <a:ext cx="1280160" cy="1280160"/>
           </a:xfrm>
           <a:prstGeom prst="roundRect">
             <a:avLst>
-              <a:gd name="adj" fmla="val 10096"/>
+              <a:gd name="adj" fmla="val 10000"/>
             </a:avLst>
           </a:prstGeom>
           <a:solidFill>
@@ -3258,12 +3258,12 @@
         </p:nvSpPr>
         <p:spPr>
           <a:xfrm>
-            <a:off x="2813304" y="2017776"/>
-            <a:ext cx="1267968" cy="1267968"/>
+            <a:off x="3447288" y="2011680"/>
+            <a:ext cx="1280160" cy="1280160"/>
           </a:xfrm>
           <a:prstGeom prst="roundRect">
             <a:avLst>
-              <a:gd name="adj" fmla="val 10096"/>
+              <a:gd name="adj" fmla="val 10000"/>
             </a:avLst>
           </a:prstGeom>
           <a:solidFill>
@@ -3305,12 +3305,12 @@
         </p:nvSpPr>
         <p:spPr>
           <a:xfrm>
-            <a:off x="4282440" y="2017776"/>
-            <a:ext cx="1267968" cy="1267968"/>
+            <a:off x="4928616" y="2011680"/>
+            <a:ext cx="1280160" cy="1280160"/>
           </a:xfrm>
           <a:prstGeom prst="roundRect">
             <a:avLst>
-              <a:gd name="adj" fmla="val 10096"/>
+              <a:gd name="adj" fmla="val 10000"/>
             </a:avLst>
           </a:prstGeom>
           <a:solidFill>
@@ -3399,12 +3399,12 @@
         </p:nvSpPr>
         <p:spPr>
           <a:xfrm>
-            <a:off x="1344168" y="3480816"/>
-            <a:ext cx="1267968" cy="1267968"/>
+            <a:off x="1965960" y="3474720"/>
+            <a:ext cx="1280160" cy="1280160"/>
           </a:xfrm>
           <a:prstGeom prst="roundRect">
             <a:avLst>
-              <a:gd name="adj" fmla="val 10096"/>
+              <a:gd name="adj" fmla="val 10000"/>
             </a:avLst>
           </a:prstGeom>
           <a:solidFill>
@@ -3446,12 +3446,12 @@
         </p:nvSpPr>
         <p:spPr>
           <a:xfrm>
-            <a:off x="2813304" y="3480816"/>
-            <a:ext cx="1267968" cy="1267968"/>
+            <a:off x="3447288" y="3474720"/>
+            <a:ext cx="1280160" cy="1280160"/>
           </a:xfrm>
           <a:prstGeom prst="roundRect">
             <a:avLst>
-              <a:gd name="adj" fmla="val 10096"/>
+              <a:gd name="adj" fmla="val 10000"/>
             </a:avLst>
           </a:prstGeom>
           <a:solidFill>
@@ -3493,12 +3493,12 @@
         </p:nvSpPr>
         <p:spPr>
           <a:xfrm>
-            <a:off x="4282440" y="3480816"/>
-            <a:ext cx="1267968" cy="1267968"/>
+            <a:off x="4928616" y="3474720"/>
+            <a:ext cx="1280160" cy="1280160"/>
           </a:xfrm>
           <a:prstGeom prst="roundRect">
             <a:avLst>
-              <a:gd name="adj" fmla="val 10096"/>
+              <a:gd name="adj" fmla="val 10000"/>
             </a:avLst>
           </a:prstGeom>
           <a:solidFill>
@@ -5319,7 +5319,7 @@
         </p:nvSpPr>
         <p:spPr>
           <a:xfrm>
-            <a:off x="2807208" y="2011680"/>
+            <a:off x="2987802" y="2011680"/>
             <a:ext cx="1280160" cy="1280160"/>
           </a:xfrm>
           <a:prstGeom prst="roundRect">
@@ -5413,7 +5413,7 @@
         </p:nvSpPr>
         <p:spPr>
           <a:xfrm>
-            <a:off x="2807208" y="3474720"/>
+            <a:off x="2987802" y="3474720"/>
             <a:ext cx="1280160" cy="1280160"/>
           </a:xfrm>
           <a:prstGeom prst="roundRect">
@@ -5507,7 +5507,7 @@
         </p:nvSpPr>
         <p:spPr>
           <a:xfrm>
-            <a:off x="2807208" y="4937760"/>
+            <a:off x="2987802" y="4937760"/>
             <a:ext cx="1280160" cy="1280160"/>
           </a:xfrm>
           <a:prstGeom prst="roundRect">
@@ -9134,7 +9134,7 @@
         </p:nvSpPr>
         <p:spPr>
           <a:xfrm>
-            <a:off x="2761488" y="2057400"/>
+            <a:off x="2942082" y="2057400"/>
             <a:ext cx="1371600" cy="1371600"/>
           </a:xfrm>
           <a:prstGeom prst="roundRect">
@@ -9228,7 +9228,7 @@
         </p:nvSpPr>
         <p:spPr>
           <a:xfrm>
-            <a:off x="8490204" y="2057400"/>
+            <a:off x="8670798" y="2057400"/>
             <a:ext cx="1371600" cy="1371600"/>
           </a:xfrm>
           <a:prstGeom prst="roundRect">
@@ -9322,7 +9322,7 @@
         </p:nvSpPr>
         <p:spPr>
           <a:xfrm>
-            <a:off x="2761488" y="3703320"/>
+            <a:off x="2942082" y="3703320"/>
             <a:ext cx="1371600" cy="1371600"/>
           </a:xfrm>
           <a:prstGeom prst="roundRect">
@@ -9416,7 +9416,7 @@
         </p:nvSpPr>
         <p:spPr>
           <a:xfrm>
-            <a:off x="8490204" y="3703320"/>
+            <a:off x="8670798" y="3703320"/>
             <a:ext cx="1371600" cy="1371600"/>
           </a:xfrm>
           <a:prstGeom prst="roundRect">

--- a/dist/초1/국어/한글/초1_국어_한글_01_기본모음_학생용.pptx
+++ b/dist/초1/국어/한글/초1_국어_한글_01_기본모음_학생용.pptx
@@ -119,20 +119,20 @@
   <p:extLst>
     <p:ext uri="{521415D9-36F7-43E2-AB2F-B90AF26B5E84}">
       <p14:sectionLst xmlns:p14="http://schemas.microsoft.com/office/powerpoint/2010/main">
-        <p14:section name="도입" id="{8c72f664-6fc8-a26f-7429-aabac320b8aa}">
+        <p14:section name="도입" id="{b0c5f6f8-50c9-6ab2-eb6f-904071381a53}">
           <p14:sldIdLst>
             <p14:sldId id="256"/>
             <p14:sldId id="257"/>
           </p14:sldIdLst>
         </p14:section>
-        <p14:section name="개념" id="{cdea476a-cc7a-69e6-27fd-c0e0c76eb689}">
+        <p14:section name="개념" id="{6b086400-41ad-8bc6-f8f3-ffeae0fc0cd6}">
           <p14:sldIdLst>
             <p14:sldId id="258"/>
             <p14:sldId id="259"/>
             <p14:sldId id="260"/>
           </p14:sldIdLst>
         </p14:section>
-        <p14:section name="연습" id="{8277f7a0-3839-72d6-c72d-87f5db2eaea8}">
+        <p14:section name="연습" id="{de451e09-fb95-8ea5-8945-0c837db97a80}">
           <p14:sldIdLst>
             <p14:sldId id="261"/>
             <p14:sldId id="262"/>
@@ -140,18 +140,18 @@
             <p14:sldId id="264"/>
           </p14:sldIdLst>
         </p14:section>
-        <p14:section name="확인" id="{0154839b-2d7d-81f1-69cb-3b316ab72e8c}">
+        <p14:section name="확인" id="{00d13a92-9eb4-ada0-60ba-84f6ddc2cc8d}">
           <p14:sldIdLst>
             <p14:sldId id="265"/>
             <p14:sldId id="266"/>
           </p14:sldIdLst>
         </p14:section>
-        <p14:section name="정리" id="{f7679877-3b32-7a6a-cfb2-6e4a7f38a7b8}">
+        <p14:section name="정리" id="{172dff03-6697-d375-093c-e3f8588035a0}">
           <p14:sldIdLst>
             <p14:sldId id="267"/>
           </p14:sldIdLst>
         </p14:section>
-        <p14:section name="보충" id="{2db3e5f3-76cc-6a03-fb1f-fde00a163736}">
+        <p14:section name="보충" id="{f55eb9ee-72ff-5020-8f91-05af47040f40}">
           <p14:sldIdLst>
             <p14:sldId id="268"/>
           </p14:sldIdLst>
@@ -8613,7 +8613,7 @@
         </p:nvSpPr>
         <p:spPr>
           <a:xfrm>
-            <a:off x="548640" y="2784348"/>
+            <a:off x="548640" y="2562860"/>
             <a:ext cx="548640" cy="548640"/>
           </a:xfrm>
           <a:prstGeom prst="ellipse">
@@ -8658,7 +8658,7 @@
         </p:nvSpPr>
         <p:spPr>
           <a:xfrm>
-            <a:off x="1325880" y="2784348"/>
+            <a:off x="1325880" y="2562860"/>
             <a:ext cx="5229271" cy="548640"/>
           </a:xfrm>
           <a:prstGeom prst="rect">
@@ -8697,7 +8697,7 @@
         </p:nvSpPr>
         <p:spPr>
           <a:xfrm>
-            <a:off x="548640" y="3497580"/>
+            <a:off x="548640" y="3321812"/>
             <a:ext cx="548640" cy="548640"/>
           </a:xfrm>
           <a:prstGeom prst="ellipse">
@@ -8742,8 +8742,8 @@
         </p:nvSpPr>
         <p:spPr>
           <a:xfrm>
-            <a:off x="1325880" y="3497580"/>
-            <a:ext cx="5229271" cy="548640"/>
+            <a:off x="1325880" y="3276092"/>
+            <a:ext cx="5229271" cy="991616"/>
           </a:xfrm>
           <a:prstGeom prst="rect">
             <a:avLst/>
@@ -8781,7 +8781,7 @@
         </p:nvSpPr>
         <p:spPr>
           <a:xfrm>
-            <a:off x="548640" y="4210812"/>
+            <a:off x="548640" y="4432300"/>
             <a:ext cx="548640" cy="548640"/>
           </a:xfrm>
           <a:prstGeom prst="ellipse">
@@ -8826,7 +8826,7 @@
         </p:nvSpPr>
         <p:spPr>
           <a:xfrm>
-            <a:off x="1325880" y="4210812"/>
+            <a:off x="1325880" y="4432300"/>
             <a:ext cx="5229271" cy="548640"/>
           </a:xfrm>
           <a:prstGeom prst="rect">
